--- a/lecons/USA/Settlement Geography/01_USA_SET_L01_Settlement_Meaning_Evolution_and_Early_Location.pptx
+++ b/lecons/USA/Settlement Geography/01_USA_SET_L01_Settlement_Meaning_Evolution_and_Early_Location.pptx
@@ -3459,7 +3459,7 @@
           <a:p>
             <a:r>
               <a:rPr lang="en-US" dirty="0"/>
-              <a:t>Before we start the new lesson, let us correct the homework I gave you at the end of Further Study 1: Population Change in Cameroon. The question was: Draw a map of Cameroon showing dense and sparse regions and the main migration flows. Take out your exercise books.</a:t>
+              <a:t>Before we start the new lesson, let us correct the homework I gave you at the end of Further Study 1: Population Change in Cameroon. The question was: Define a settlement. Take out your exercise books.</a:t>
             </a:r>
             <a:endParaRPr lang="en-US" dirty="0"/>
           </a:p>
@@ -4427,7 +4427,7 @@
           <a:p>
             <a:r>
               <a:rPr lang="en-US" dirty="0"/>
-              <a:t>Here is a good answer. The map shows dense regions (Littoral, West, North-West, Far North) and sparse regions (East, South, Adamawa), with arrows from the West, North and villages to Douala and Yaoundé. Compare it with your own answer and correct your work in red.</a:t>
+              <a:t>Here is a good answer. A settlement is a place where people live, from a single house or hamlet to a large city. Compare it with your own answer and correct your work in red.</a:t>
             </a:r>
             <a:endParaRPr lang="en-US" dirty="0"/>
           </a:p>
@@ -15032,7 +15032,7 @@
                 <a:ea typeface="Times New Roman" pitchFamily="34" charset="-122"/>
                 <a:cs typeface="Times New Roman" pitchFamily="34" charset="-120"/>
               </a:rPr>
-              <a:t>Draw a map of Cameroon showing dense and sparse regions and the main migration flows.</a:t>
+              <a:t>Define a settlement.</a:t>
             </a:r>
             <a:endParaRPr lang="en-US" sz="4000" dirty="0"/>
           </a:p>
@@ -17556,7 +17556,7 @@
                 <a:ea typeface="Times New Roman" pitchFamily="34" charset="-122"/>
                 <a:cs typeface="Times New Roman" pitchFamily="34" charset="-120"/>
               </a:rPr>
-              <a:t>The map shows dense regions (Littoral, West, North-West, Far North) and sparse regions (East, South, Adamawa), with arrows from the West, North and villages to Douala and Yaoundé.</a:t>
+              <a:t>A settlement is a place where people live, from a single house or hamlet to a large city.</a:t>
             </a:r>
             <a:endParaRPr lang="en-US" sz="4000" dirty="0"/>
           </a:p>

--- a/lecons/USA/Settlement Geography/01_USA_SET_L01_Settlement_Meaning_Evolution_and_Early_Location.pptx
+++ b/lecons/USA/Settlement Geography/01_USA_SET_L01_Settlement_Meaning_Evolution_and_Early_Location.pptx
@@ -3459,7 +3459,7 @@
           <a:p>
             <a:r>
               <a:rPr lang="en-US" dirty="0"/>
-              <a:t>Before we start the new lesson, let us correct the homework I gave you at the end of Further Study 1: Population Change in Cameroon. The question was: Define a settlement. Take out your exercise books.</a:t>
+              <a:t>Before we start the new lesson, let us correct the homework I gave you at the end of Lesson 18: Theories of Population and Resources: Malthus and Boserup. The question was: Define a settlement. Take out your exercise books.</a:t>
             </a:r>
             <a:endParaRPr lang="en-US" dirty="0"/>
           </a:p>
@@ -4427,7 +4427,7 @@
           <a:p>
             <a:r>
               <a:rPr lang="en-US" dirty="0"/>
-              <a:t>Here is a good answer. A settlement is a place where people live, from a single house or hamlet to a large city. Compare it with your own answer and correct your work in red.</a:t>
+              <a:t>Here is a good answer. A settlement is a place where people live, from a single house to a large city. Compare it with your own answer and correct your work in red.</a:t>
             </a:r>
             <a:endParaRPr lang="en-US" dirty="0"/>
           </a:p>
@@ -15012,7 +15012,7 @@
                 <a:ea typeface="Times New Roman" pitchFamily="34" charset="-122"/>
                 <a:cs typeface="Times New Roman" pitchFamily="34" charset="-120"/>
               </a:rPr>
-              <a:t>Question (Further Study 1: Population Change in Cameroon):</a:t>
+              <a:t>Question (Lesson 18: Theories of Population and Resources: Malthus and Boserup):</a:t>
             </a:r>
             <a:endParaRPr lang="en-US" sz="4000" dirty="0"/>
           </a:p>
@@ -17556,7 +17556,7 @@
                 <a:ea typeface="Times New Roman" pitchFamily="34" charset="-122"/>
                 <a:cs typeface="Times New Roman" pitchFamily="34" charset="-120"/>
               </a:rPr>
-              <a:t>A settlement is a place where people live, from a single house or hamlet to a large city.</a:t>
+              <a:t>A settlement is a place where people live, from a single house to a large city.</a:t>
             </a:r>
             <a:endParaRPr lang="en-US" sz="4000" dirty="0"/>
           </a:p>
